--- a/0 DB/资产状态.pptx
+++ b/0 DB/资产状态.pptx
@@ -3733,1201 +3733,1196 @@
       <p:grpSpPr/>
       <p:grpSp>
         <p:nvGrpSpPr>
-          <p:cNvPr id="19" name="组合 18"/>
+          <p:cNvPr id="44" name="组合 43"/>
           <p:cNvGrpSpPr/>
           <p:nvPr userDrawn="1"/>
         </p:nvGrpSpPr>
         <p:grpSpPr>
           <a:xfrm>
-            <a:off x="0" y="3240405"/>
-            <a:ext cx="3770630" cy="3459480"/>
-            <a:chOff x="0" y="4893"/>
-            <a:chExt cx="5938" cy="5448"/>
+            <a:off x="667976" y="0"/>
+            <a:ext cx="5521960" cy="5198745"/>
+            <a:chOff x="1051" y="0"/>
+            <a:chExt cx="8696" cy="8187"/>
           </a:xfrm>
         </p:grpSpPr>
-        <p:sp>
-          <p:nvSpPr>
-            <p:cNvPr id="7" name="矩形 6"/>
-            <p:cNvSpPr/>
+        <p:grpSp>
+          <p:nvGrpSpPr>
+            <p:cNvPr id="42" name="组合 41"/>
+            <p:cNvGrpSpPr/>
             <p:nvPr userDrawn="1"/>
-          </p:nvSpPr>
-          <p:spPr>
+          </p:nvGrpSpPr>
+          <p:grpSpPr>
             <a:xfrm>
-              <a:off x="0" y="5475"/>
-              <a:ext cx="2356" cy="1208"/>
+              <a:off x="3382" y="4111"/>
+              <a:ext cx="4035" cy="4076"/>
+              <a:chOff x="0" y="4726"/>
+              <a:chExt cx="4035" cy="4076"/>
             </a:xfrm>
-            <a:prstGeom prst="rect">
-              <a:avLst/>
-            </a:prstGeom>
-            <a:solidFill>
-              <a:schemeClr val="accent6">
-                <a:alpha val="100000"/>
-              </a:schemeClr>
-            </a:solidFill>
-            <a:ln w="12700" cmpd="sng">
-              <a:noFill/>
-              <a:prstDash val="solid"/>
-              <a:miter lim="800000"/>
-            </a:ln>
-          </p:spPr>
-          <p:style>
-            <a:lnRef idx="2">
-              <a:schemeClr val="accent1">
-                <a:lumMod val="75000"/>
-              </a:schemeClr>
-            </a:lnRef>
-            <a:fillRef idx="1">
-              <a:schemeClr val="accent1"/>
-            </a:fillRef>
-            <a:effectRef idx="0">
-              <a:srgbClr val="FFFFFF"/>
-            </a:effectRef>
-            <a:fontRef idx="minor">
-              <a:schemeClr val="lt1"/>
-            </a:fontRef>
-          </p:style>
-          <p:txBody>
-            <a:bodyPr rtlCol="0" anchor="ctr">
-              <a:noAutofit/>
-            </a:bodyPr>
-            <a:p>
-              <a:pPr algn="ctr"/>
-              <a:r>
-                <a:rPr lang="zh-CN" altLang="en-US">
+          </p:grpSpPr>
+          <p:sp>
+            <p:nvSpPr>
+              <p:cNvPr id="7" name="矩形 6"/>
+              <p:cNvSpPr/>
+              <p:nvPr userDrawn="1"/>
+            </p:nvSpPr>
+            <p:spPr>
+              <a:xfrm>
+                <a:off x="0" y="5257"/>
+                <a:ext cx="1701" cy="850"/>
+              </a:xfrm>
+              <a:prstGeom prst="rect">
+                <a:avLst/>
+              </a:prstGeom>
+              <a:solidFill>
+                <a:schemeClr val="accent6">
+                  <a:alpha val="100000"/>
+                </a:schemeClr>
+              </a:solidFill>
+              <a:ln w="12700" cmpd="sng">
+                <a:noFill/>
+                <a:prstDash val="solid"/>
+                <a:miter lim="800000"/>
+              </a:ln>
+            </p:spPr>
+            <p:style>
+              <a:lnRef idx="2">
+                <a:schemeClr val="accent1">
+                  <a:lumMod val="75000"/>
+                </a:schemeClr>
+              </a:lnRef>
+              <a:fillRef idx="1">
+                <a:schemeClr val="accent1"/>
+              </a:fillRef>
+              <a:effectRef idx="0">
+                <a:srgbClr val="FFFFFF"/>
+              </a:effectRef>
+              <a:fontRef idx="minor">
+                <a:schemeClr val="lt1"/>
+              </a:fontRef>
+            </p:style>
+            <p:txBody>
+              <a:bodyPr rtlCol="0" anchor="ctr">
+                <a:noAutofit/>
+              </a:bodyPr>
+              <a:p>
+                <a:pPr algn="ctr"/>
+                <a:r>
+                  <a:rPr lang="zh-CN" altLang="en-US" sz="1600">
+                    <a:solidFill>
+                      <a:schemeClr val="bg1"/>
+                    </a:solidFill>
+                    <a:latin typeface="微软雅黑" charset="0"/>
+                    <a:ea typeface="微软雅黑" charset="0"/>
+                    <a:cs typeface="微软雅黑" charset="0"/>
+                  </a:rPr>
+                  <a:t>在线</a:t>
+                </a:r>
+                <a:endParaRPr lang="zh-CN" altLang="en-US" sz="1600">
                   <a:solidFill>
                     <a:schemeClr val="bg1"/>
                   </a:solidFill>
                   <a:latin typeface="微软雅黑" charset="0"/>
                   <a:ea typeface="微软雅黑" charset="0"/>
                   <a:cs typeface="微软雅黑" charset="0"/>
-                </a:rPr>
-                <a:t>在线</a:t>
-              </a:r>
-              <a:endParaRPr lang="zh-CN" altLang="en-US">
-                <a:solidFill>
-                  <a:schemeClr val="bg1"/>
-                </a:solidFill>
-                <a:latin typeface="微软雅黑" charset="0"/>
-                <a:ea typeface="微软雅黑" charset="0"/>
-                <a:cs typeface="微软雅黑" charset="0"/>
-              </a:endParaRPr>
-            </a:p>
-          </p:txBody>
-        </p:sp>
-        <p:sp>
-          <p:nvSpPr>
-            <p:cNvPr id="2" name="矩形 1"/>
-            <p:cNvSpPr/>
-            <p:nvPr userDrawn="1"/>
-          </p:nvSpPr>
-          <p:spPr>
-            <a:xfrm>
-              <a:off x="3582" y="5475"/>
-              <a:ext cx="2356" cy="1208"/>
-            </a:xfrm>
-            <a:prstGeom prst="rect">
-              <a:avLst/>
-            </a:prstGeom>
-            <a:ln w="12700" cmpd="sng">
-              <a:noFill/>
-              <a:prstDash val="solid"/>
-              <a:miter lim="800000"/>
-            </a:ln>
-          </p:spPr>
-          <p:style>
-            <a:lnRef idx="2">
-              <a:schemeClr val="accent1">
-                <a:lumMod val="75000"/>
-              </a:schemeClr>
-            </a:lnRef>
-            <a:fillRef idx="1">
-              <a:schemeClr val="accent1"/>
-            </a:fillRef>
-            <a:effectRef idx="0">
-              <a:srgbClr val="FFFFFF"/>
-            </a:effectRef>
-            <a:fontRef idx="minor">
-              <a:schemeClr val="lt1"/>
-            </a:fontRef>
-          </p:style>
-          <p:txBody>
-            <a:bodyPr rtlCol="0" anchor="ctr">
-              <a:noAutofit/>
-            </a:bodyPr>
-            <a:p>
-              <a:pPr algn="ctr"/>
-              <a:r>
-                <a:rPr lang="zh-CN" altLang="en-US">
+                </a:endParaRPr>
+              </a:p>
+            </p:txBody>
+          </p:sp>
+          <p:sp>
+            <p:nvSpPr>
+              <p:cNvPr id="2" name="矩形 1"/>
+              <p:cNvSpPr/>
+              <p:nvPr userDrawn="1"/>
+            </p:nvSpPr>
+            <p:spPr>
+              <a:xfrm>
+                <a:off x="2335" y="5257"/>
+                <a:ext cx="1700" cy="850"/>
+              </a:xfrm>
+              <a:prstGeom prst="rect">
+                <a:avLst/>
+              </a:prstGeom>
+              <a:ln w="12700" cmpd="sng">
+                <a:noFill/>
+                <a:prstDash val="solid"/>
+                <a:miter lim="800000"/>
+              </a:ln>
+            </p:spPr>
+            <p:style>
+              <a:lnRef idx="2">
+                <a:schemeClr val="accent1">
+                  <a:lumMod val="75000"/>
+                </a:schemeClr>
+              </a:lnRef>
+              <a:fillRef idx="1">
+                <a:schemeClr val="accent1"/>
+              </a:fillRef>
+              <a:effectRef idx="0">
+                <a:srgbClr val="FFFFFF"/>
+              </a:effectRef>
+              <a:fontRef idx="minor">
+                <a:schemeClr val="lt1"/>
+              </a:fontRef>
+            </p:style>
+            <p:txBody>
+              <a:bodyPr rtlCol="0" anchor="ctr">
+                <a:noAutofit/>
+              </a:bodyPr>
+              <a:p>
+                <a:pPr algn="ctr"/>
+                <a:r>
+                  <a:rPr lang="zh-CN" altLang="en-US" sz="1600">
+                    <a:solidFill>
+                      <a:schemeClr val="bg1"/>
+                    </a:solidFill>
+                    <a:latin typeface="微软雅黑" charset="0"/>
+                    <a:ea typeface="微软雅黑" charset="0"/>
+                    <a:cs typeface="微软雅黑" charset="0"/>
+                  </a:rPr>
+                  <a:t>无信号</a:t>
+                </a:r>
+                <a:endParaRPr lang="zh-CN" altLang="en-US" sz="1600">
                   <a:solidFill>
                     <a:schemeClr val="bg1"/>
                   </a:solidFill>
                   <a:latin typeface="微软雅黑" charset="0"/>
                   <a:ea typeface="微软雅黑" charset="0"/>
                   <a:cs typeface="微软雅黑" charset="0"/>
-                </a:rPr>
-                <a:t>无信号</a:t>
-              </a:r>
-              <a:endParaRPr lang="zh-CN" altLang="en-US">
-                <a:solidFill>
-                  <a:schemeClr val="bg1"/>
-                </a:solidFill>
-                <a:latin typeface="微软雅黑" charset="0"/>
-                <a:ea typeface="微软雅黑" charset="0"/>
-                <a:cs typeface="微软雅黑" charset="0"/>
-              </a:endParaRPr>
-            </a:p>
-          </p:txBody>
-        </p:sp>
-        <p:sp>
-          <p:nvSpPr>
-            <p:cNvPr id="3" name="矩形 2"/>
-            <p:cNvSpPr/>
-            <p:nvPr userDrawn="1"/>
-          </p:nvSpPr>
-          <p:spPr>
-            <a:xfrm>
-              <a:off x="3582" y="7285"/>
-              <a:ext cx="2356" cy="1208"/>
-            </a:xfrm>
-            <a:prstGeom prst="rect">
-              <a:avLst/>
-            </a:prstGeom>
-            <a:ln w="12700" cmpd="sng">
-              <a:noFill/>
-              <a:prstDash val="solid"/>
-              <a:miter lim="800000"/>
-            </a:ln>
-          </p:spPr>
-          <p:style>
-            <a:lnRef idx="2">
-              <a:schemeClr val="accent1">
-                <a:lumMod val="75000"/>
-              </a:schemeClr>
-            </a:lnRef>
-            <a:fillRef idx="1">
-              <a:schemeClr val="accent1"/>
-            </a:fillRef>
-            <a:effectRef idx="0">
-              <a:srgbClr val="FFFFFF"/>
-            </a:effectRef>
-            <a:fontRef idx="minor">
-              <a:schemeClr val="lt1"/>
-            </a:fontRef>
-          </p:style>
-          <p:txBody>
-            <a:bodyPr rtlCol="0" anchor="ctr">
-              <a:noAutofit/>
-            </a:bodyPr>
-            <a:p>
-              <a:pPr algn="ctr"/>
-              <a:r>
-                <a:rPr lang="zh-CN" altLang="en-US">
+                </a:endParaRPr>
+              </a:p>
+            </p:txBody>
+          </p:sp>
+          <p:sp>
+            <p:nvSpPr>
+              <p:cNvPr id="3" name="矩形 2"/>
+              <p:cNvSpPr/>
+              <p:nvPr userDrawn="1"/>
+            </p:nvSpPr>
+            <p:spPr>
+              <a:xfrm>
+                <a:off x="2335" y="6602"/>
+                <a:ext cx="1701" cy="850"/>
+              </a:xfrm>
+              <a:prstGeom prst="rect">
+                <a:avLst/>
+              </a:prstGeom>
+              <a:ln w="12700" cmpd="sng">
+                <a:noFill/>
+                <a:prstDash val="solid"/>
+                <a:miter lim="800000"/>
+              </a:ln>
+            </p:spPr>
+            <p:style>
+              <a:lnRef idx="2">
+                <a:schemeClr val="accent1">
+                  <a:lumMod val="75000"/>
+                </a:schemeClr>
+              </a:lnRef>
+              <a:fillRef idx="1">
+                <a:schemeClr val="accent1"/>
+              </a:fillRef>
+              <a:effectRef idx="0">
+                <a:srgbClr val="FFFFFF"/>
+              </a:effectRef>
+              <a:fontRef idx="minor">
+                <a:schemeClr val="lt1"/>
+              </a:fontRef>
+            </p:style>
+            <p:txBody>
+              <a:bodyPr rtlCol="0" anchor="ctr">
+                <a:noAutofit/>
+              </a:bodyPr>
+              <a:p>
+                <a:pPr algn="ctr"/>
+                <a:r>
+                  <a:rPr lang="zh-CN" altLang="en-US" sz="1600">
+                    <a:solidFill>
+                      <a:schemeClr val="bg1"/>
+                    </a:solidFill>
+                    <a:latin typeface="微软雅黑" charset="0"/>
+                    <a:ea typeface="微软雅黑" charset="0"/>
+                    <a:cs typeface="微软雅黑" charset="0"/>
+                  </a:rPr>
+                  <a:t>故障</a:t>
+                </a:r>
+                <a:endParaRPr lang="zh-CN" altLang="en-US" sz="1600">
                   <a:solidFill>
                     <a:schemeClr val="bg1"/>
                   </a:solidFill>
                   <a:latin typeface="微软雅黑" charset="0"/>
                   <a:ea typeface="微软雅黑" charset="0"/>
                   <a:cs typeface="微软雅黑" charset="0"/>
-                </a:rPr>
-                <a:t>故障</a:t>
-              </a:r>
-              <a:endParaRPr lang="zh-CN" altLang="en-US">
-                <a:solidFill>
-                  <a:schemeClr val="bg1"/>
-                </a:solidFill>
-                <a:latin typeface="微软雅黑" charset="0"/>
-                <a:ea typeface="微软雅黑" charset="0"/>
-                <a:cs typeface="微软雅黑" charset="0"/>
-              </a:endParaRPr>
-            </a:p>
-          </p:txBody>
-        </p:sp>
-        <p:sp>
-          <p:nvSpPr>
-            <p:cNvPr id="10" name="矩形 9"/>
-            <p:cNvSpPr/>
-            <p:nvPr userDrawn="1"/>
-          </p:nvSpPr>
-          <p:spPr>
-            <a:xfrm>
-              <a:off x="3582" y="9133"/>
-              <a:ext cx="2356" cy="1208"/>
-            </a:xfrm>
-            <a:prstGeom prst="rect">
-              <a:avLst/>
-            </a:prstGeom>
-            <a:ln w="12700" cmpd="sng">
-              <a:noFill/>
-              <a:prstDash val="solid"/>
-              <a:miter lim="800000"/>
-            </a:ln>
-          </p:spPr>
-          <p:style>
-            <a:lnRef idx="2">
-              <a:schemeClr val="accent1">
-                <a:lumMod val="75000"/>
-              </a:schemeClr>
-            </a:lnRef>
-            <a:fillRef idx="1">
-              <a:schemeClr val="accent1"/>
-            </a:fillRef>
-            <a:effectRef idx="0">
-              <a:srgbClr val="FFFFFF"/>
-            </a:effectRef>
-            <a:fontRef idx="minor">
-              <a:schemeClr val="lt1"/>
-            </a:fontRef>
-          </p:style>
-          <p:txBody>
-            <a:bodyPr rtlCol="0" anchor="ctr">
-              <a:noAutofit/>
-            </a:bodyPr>
-            <a:p>
-              <a:pPr algn="ctr"/>
-              <a:r>
-                <a:rPr lang="zh-CN" altLang="en-US">
+                </a:endParaRPr>
+              </a:p>
+            </p:txBody>
+          </p:sp>
+          <p:sp>
+            <p:nvSpPr>
+              <p:cNvPr id="10" name="矩形 9"/>
+              <p:cNvSpPr/>
+              <p:nvPr userDrawn="1"/>
+            </p:nvSpPr>
+            <p:spPr>
+              <a:xfrm>
+                <a:off x="2335" y="7952"/>
+                <a:ext cx="1701" cy="850"/>
+              </a:xfrm>
+              <a:prstGeom prst="rect">
+                <a:avLst/>
+              </a:prstGeom>
+              <a:ln w="12700" cmpd="sng">
+                <a:noFill/>
+                <a:prstDash val="solid"/>
+                <a:miter lim="800000"/>
+              </a:ln>
+            </p:spPr>
+            <p:style>
+              <a:lnRef idx="2">
+                <a:schemeClr val="accent1">
+                  <a:lumMod val="75000"/>
+                </a:schemeClr>
+              </a:lnRef>
+              <a:fillRef idx="1">
+                <a:schemeClr val="accent1"/>
+              </a:fillRef>
+              <a:effectRef idx="0">
+                <a:srgbClr val="FFFFFF"/>
+              </a:effectRef>
+              <a:fontRef idx="minor">
+                <a:schemeClr val="lt1"/>
+              </a:fontRef>
+            </p:style>
+            <p:txBody>
+              <a:bodyPr rtlCol="0" anchor="ctr">
+                <a:noAutofit/>
+              </a:bodyPr>
+              <a:p>
+                <a:pPr algn="ctr"/>
+                <a:r>
+                  <a:rPr lang="zh-CN" altLang="en-US" sz="1600">
+                    <a:solidFill>
+                      <a:schemeClr val="bg1"/>
+                    </a:solidFill>
+                    <a:latin typeface="微软雅黑" charset="0"/>
+                    <a:ea typeface="微软雅黑" charset="0"/>
+                    <a:cs typeface="微软雅黑" charset="0"/>
+                  </a:rPr>
+                  <a:t>丢失</a:t>
+                </a:r>
+                <a:endParaRPr lang="zh-CN" altLang="en-US" sz="1600">
                   <a:solidFill>
                     <a:schemeClr val="bg1"/>
                   </a:solidFill>
                   <a:latin typeface="微软雅黑" charset="0"/>
                   <a:ea typeface="微软雅黑" charset="0"/>
                   <a:cs typeface="微软雅黑" charset="0"/>
-                </a:rPr>
-                <a:t>丢失</a:t>
-              </a:r>
-              <a:endParaRPr lang="zh-CN" altLang="en-US">
-                <a:solidFill>
-                  <a:schemeClr val="bg1"/>
-                </a:solidFill>
-                <a:latin typeface="微软雅黑" charset="0"/>
-                <a:ea typeface="微软雅黑" charset="0"/>
-                <a:cs typeface="微软雅黑" charset="0"/>
-              </a:endParaRPr>
-            </a:p>
-          </p:txBody>
-        </p:sp>
-        <p:sp>
-          <p:nvSpPr>
-            <p:cNvPr id="23" name="矩形 22"/>
-            <p:cNvSpPr/>
-            <p:nvPr userDrawn="1"/>
-          </p:nvSpPr>
-          <p:spPr>
-            <a:xfrm>
-              <a:off x="0" y="7285"/>
-              <a:ext cx="2356" cy="1208"/>
-            </a:xfrm>
-            <a:prstGeom prst="rect">
-              <a:avLst/>
-            </a:prstGeom>
-            <a:solidFill>
-              <a:srgbClr val="C00000">
-                <a:alpha val="100000"/>
-              </a:srgbClr>
-            </a:solidFill>
-            <a:ln w="12700" cmpd="sng">
-              <a:noFill/>
-              <a:prstDash val="solid"/>
-              <a:miter lim="800000"/>
-            </a:ln>
-          </p:spPr>
-          <p:style>
-            <a:lnRef idx="2">
-              <a:schemeClr val="accent1">
-                <a:lumMod val="75000"/>
-              </a:schemeClr>
-            </a:lnRef>
-            <a:fillRef idx="1">
-              <a:schemeClr val="accent1"/>
-            </a:fillRef>
-            <a:effectRef idx="0">
-              <a:srgbClr val="FFFFFF"/>
-            </a:effectRef>
-            <a:fontRef idx="minor">
-              <a:schemeClr val="lt1"/>
-            </a:fontRef>
-          </p:style>
-          <p:txBody>
-            <a:bodyPr rtlCol="0" anchor="ctr">
-              <a:noAutofit/>
-            </a:bodyPr>
-            <a:p>
-              <a:pPr algn="ctr"/>
-              <a:r>
-                <a:rPr lang="zh-CN" altLang="en-US">
+                </a:endParaRPr>
+              </a:p>
+            </p:txBody>
+          </p:sp>
+          <p:sp>
+            <p:nvSpPr>
+              <p:cNvPr id="23" name="矩形 22"/>
+              <p:cNvSpPr/>
+              <p:nvPr userDrawn="1"/>
+            </p:nvSpPr>
+            <p:spPr>
+              <a:xfrm>
+                <a:off x="0" y="6602"/>
+                <a:ext cx="1701" cy="850"/>
+              </a:xfrm>
+              <a:prstGeom prst="rect">
+                <a:avLst/>
+              </a:prstGeom>
+              <a:solidFill>
+                <a:srgbClr val="C00000">
+                  <a:alpha val="100000"/>
+                </a:srgbClr>
+              </a:solidFill>
+              <a:ln w="12700" cmpd="sng">
+                <a:noFill/>
+                <a:prstDash val="solid"/>
+                <a:miter lim="800000"/>
+              </a:ln>
+            </p:spPr>
+            <p:style>
+              <a:lnRef idx="2">
+                <a:schemeClr val="accent1">
+                  <a:lumMod val="75000"/>
+                </a:schemeClr>
+              </a:lnRef>
+              <a:fillRef idx="1">
+                <a:schemeClr val="accent1"/>
+              </a:fillRef>
+              <a:effectRef idx="0">
+                <a:srgbClr val="FFFFFF"/>
+              </a:effectRef>
+              <a:fontRef idx="minor">
+                <a:schemeClr val="lt1"/>
+              </a:fontRef>
+            </p:style>
+            <p:txBody>
+              <a:bodyPr rtlCol="0" anchor="ctr">
+                <a:noAutofit/>
+              </a:bodyPr>
+              <a:p>
+                <a:pPr algn="ctr"/>
+                <a:r>
+                  <a:rPr lang="zh-CN" altLang="en-US" sz="1600">
+                    <a:solidFill>
+                      <a:schemeClr val="bg1"/>
+                    </a:solidFill>
+                    <a:latin typeface="微软雅黑" charset="0"/>
+                    <a:ea typeface="微软雅黑" charset="0"/>
+                    <a:cs typeface="微软雅黑" charset="0"/>
+                  </a:rPr>
+                  <a:t>离线</a:t>
+                </a:r>
+                <a:endParaRPr lang="zh-CN" altLang="en-US" sz="1600">
                   <a:solidFill>
                     <a:schemeClr val="bg1"/>
                   </a:solidFill>
                   <a:latin typeface="微软雅黑" charset="0"/>
                   <a:ea typeface="微软雅黑" charset="0"/>
                   <a:cs typeface="微软雅黑" charset="0"/>
-                </a:rPr>
-                <a:t>离线</a:t>
-              </a:r>
-              <a:endParaRPr lang="zh-CN" altLang="en-US">
-                <a:solidFill>
-                  <a:schemeClr val="bg1"/>
-                </a:solidFill>
-                <a:latin typeface="微软雅黑" charset="0"/>
-                <a:ea typeface="微软雅黑" charset="0"/>
-                <a:cs typeface="微软雅黑" charset="0"/>
-              </a:endParaRPr>
-            </a:p>
-          </p:txBody>
-        </p:sp>
-        <p:cxnSp>
-          <p:nvCxnSpPr>
-            <p:cNvPr id="24" name="直接箭头连接符 23"/>
-            <p:cNvCxnSpPr>
-              <a:stCxn id="7" idx="2"/>
-              <a:endCxn id="23" idx="0"/>
-            </p:cNvCxnSpPr>
+                </a:endParaRPr>
+              </a:p>
+            </p:txBody>
+          </p:sp>
+          <p:cxnSp>
+            <p:nvCxnSpPr>
+              <p:cNvPr id="24" name="直接箭头连接符 23"/>
+              <p:cNvCxnSpPr>
+                <a:stCxn id="7" idx="2"/>
+                <a:endCxn id="23" idx="0"/>
+              </p:cNvCxnSpPr>
+              <p:nvPr userDrawn="1"/>
+            </p:nvCxnSpPr>
+            <p:spPr>
+              <a:xfrm>
+                <a:off x="851" y="6107"/>
+                <a:ext cx="0" cy="495"/>
+              </a:xfrm>
+              <a:prstGeom prst="straightConnector1">
+                <a:avLst/>
+              </a:prstGeom>
+              <a:ln w="19050">
+                <a:headEnd type="triangle"/>
+                <a:tailEnd type="triangle"/>
+              </a:ln>
+            </p:spPr>
+            <p:style>
+              <a:lnRef idx="2">
+                <a:schemeClr val="accent1"/>
+              </a:lnRef>
+              <a:fillRef idx="0">
+                <a:srgbClr val="FFFFFF"/>
+              </a:fillRef>
+              <a:effectRef idx="0">
+                <a:srgbClr val="FFFFFF"/>
+              </a:effectRef>
+              <a:fontRef idx="minor">
+                <a:schemeClr val="tx1"/>
+              </a:fontRef>
+            </p:style>
+          </p:cxnSp>
+          <p:cxnSp>
+            <p:nvCxnSpPr>
+              <p:cNvPr id="25" name="直接连接符 24"/>
+              <p:cNvCxnSpPr>
+                <a:stCxn id="23" idx="3"/>
+                <a:endCxn id="2" idx="1"/>
+              </p:cNvCxnSpPr>
+              <p:nvPr userDrawn="1"/>
+            </p:nvCxnSpPr>
+            <p:spPr>
+              <a:xfrm flipV="1">
+                <a:off x="1701" y="5682"/>
+                <a:ext cx="634" cy="1345"/>
+              </a:xfrm>
+              <a:prstGeom prst="line">
+                <a:avLst/>
+              </a:prstGeom>
+              <a:ln w="19050" cmpd="sng">
+                <a:prstDash val="dash"/>
+              </a:ln>
+            </p:spPr>
+            <p:style>
+              <a:lnRef idx="2">
+                <a:schemeClr val="accent1"/>
+              </a:lnRef>
+              <a:fillRef idx="0">
+                <a:srgbClr val="FFFFFF"/>
+              </a:fillRef>
+              <a:effectRef idx="0">
+                <a:srgbClr val="FFFFFF"/>
+              </a:effectRef>
+              <a:fontRef idx="minor">
+                <a:schemeClr val="tx1"/>
+              </a:fontRef>
+            </p:style>
+          </p:cxnSp>
+          <p:cxnSp>
+            <p:nvCxnSpPr>
+              <p:cNvPr id="26" name="直接连接符 25"/>
+              <p:cNvCxnSpPr>
+                <a:stCxn id="23" idx="3"/>
+                <a:endCxn id="10" idx="1"/>
+              </p:cNvCxnSpPr>
+              <p:nvPr userDrawn="1"/>
+            </p:nvCxnSpPr>
+            <p:spPr>
+              <a:xfrm>
+                <a:off x="1701" y="7027"/>
+                <a:ext cx="634" cy="1350"/>
+              </a:xfrm>
+              <a:prstGeom prst="line">
+                <a:avLst/>
+              </a:prstGeom>
+              <a:ln w="19050" cmpd="sng">
+                <a:prstDash val="dash"/>
+              </a:ln>
+            </p:spPr>
+            <p:style>
+              <a:lnRef idx="2">
+                <a:schemeClr val="accent1"/>
+              </a:lnRef>
+              <a:fillRef idx="0">
+                <a:srgbClr val="FFFFFF"/>
+              </a:fillRef>
+              <a:effectRef idx="0">
+                <a:srgbClr val="FFFFFF"/>
+              </a:effectRef>
+              <a:fontRef idx="minor">
+                <a:schemeClr val="tx1"/>
+              </a:fontRef>
+            </p:style>
+          </p:cxnSp>
+          <p:cxnSp>
+            <p:nvCxnSpPr>
+              <p:cNvPr id="27" name="直接连接符 26"/>
+              <p:cNvCxnSpPr>
+                <a:stCxn id="23" idx="3"/>
+                <a:endCxn id="3" idx="1"/>
+              </p:cNvCxnSpPr>
+              <p:nvPr userDrawn="1"/>
+            </p:nvCxnSpPr>
+            <p:spPr>
+              <a:xfrm>
+                <a:off x="1701" y="7027"/>
+                <a:ext cx="634" cy="0"/>
+              </a:xfrm>
+              <a:prstGeom prst="line">
+                <a:avLst/>
+              </a:prstGeom>
+              <a:ln w="19050" cmpd="sng">
+                <a:prstDash val="dash"/>
+              </a:ln>
+            </p:spPr>
+            <p:style>
+              <a:lnRef idx="2">
+                <a:schemeClr val="accent1"/>
+              </a:lnRef>
+              <a:fillRef idx="0">
+                <a:srgbClr val="FFFFFF"/>
+              </a:fillRef>
+              <a:effectRef idx="0">
+                <a:srgbClr val="FFFFFF"/>
+              </a:effectRef>
+              <a:fontRef idx="minor">
+                <a:schemeClr val="tx1"/>
+              </a:fontRef>
+            </p:style>
+          </p:cxnSp>
+          <p:sp>
+            <p:nvSpPr>
+              <p:cNvPr id="11" name="文本框 10"/>
+              <p:cNvSpPr txBox="1"/>
+              <p:nvPr userDrawn="1"/>
+            </p:nvSpPr>
+            <p:spPr>
+              <a:xfrm>
+                <a:off x="66" y="4726"/>
+                <a:ext cx="1568" cy="531"/>
+              </a:xfrm>
+              <a:prstGeom prst="rect">
+                <a:avLst/>
+              </a:prstGeom>
+            </p:spPr>
+            <p:txBody>
+              <a:bodyPr wrap="none" rtlCol="0">
+                <a:noAutofit/>
+              </a:bodyPr>
+              <a:p>
+                <a:r>
+                  <a:rPr lang="zh-CN" altLang="en-US" sz="1600">
+                    <a:solidFill>
+                      <a:srgbClr val="000000"/>
+                    </a:solidFill>
+                  </a:rPr>
+                  <a:t>在线</a:t>
+                </a:r>
+                <a:r>
+                  <a:rPr lang="zh-CN" altLang="en-US" sz="1600">
+                    <a:solidFill>
+                      <a:srgbClr val="000000"/>
+                    </a:solidFill>
+                    <a:cs typeface="Arial" panose="020B0604020202020204" pitchFamily="34" charset="0"/>
+                  </a:rPr>
+                  <a:t>状态</a:t>
+                </a:r>
+                <a:endParaRPr lang="zh-CN" altLang="en-US" sz="1600">
+                  <a:solidFill>
+                    <a:srgbClr val="000000"/>
+                  </a:solidFill>
+                </a:endParaRPr>
+              </a:p>
+            </p:txBody>
+          </p:sp>
+          <p:sp>
+            <p:nvSpPr>
+              <p:cNvPr id="14" name="文本框 13"/>
+              <p:cNvSpPr txBox="1"/>
+              <p:nvPr userDrawn="1"/>
+            </p:nvSpPr>
+            <p:spPr>
+              <a:xfrm>
+                <a:off x="2401" y="4726"/>
+                <a:ext cx="1568" cy="531"/>
+              </a:xfrm>
+              <a:prstGeom prst="rect">
+                <a:avLst/>
+              </a:prstGeom>
+            </p:spPr>
+            <p:txBody>
+              <a:bodyPr wrap="none" rtlCol="0">
+                <a:noAutofit/>
+              </a:bodyPr>
+              <a:p>
+                <a:pPr algn="l"/>
+                <a:r>
+                  <a:rPr lang="zh-CN" altLang="en-US" sz="1600">
+                    <a:solidFill>
+                      <a:srgbClr val="000000"/>
+                    </a:solidFill>
+                  </a:rPr>
+                  <a:t>异常类型</a:t>
+                </a:r>
+                <a:endParaRPr lang="zh-CN" altLang="en-US" sz="1600">
+                  <a:solidFill>
+                    <a:srgbClr val="000000"/>
+                  </a:solidFill>
+                </a:endParaRPr>
+              </a:p>
+            </p:txBody>
+          </p:sp>
+        </p:grpSp>
+        <p:grpSp>
+          <p:nvGrpSpPr>
+            <p:cNvPr id="43" name="组合 42"/>
+            <p:cNvGrpSpPr/>
             <p:nvPr userDrawn="1"/>
-          </p:nvCxnSpPr>
-          <p:spPr>
+          </p:nvGrpSpPr>
+          <p:grpSpPr>
             <a:xfrm>
-              <a:off x="1178" y="6683"/>
-              <a:ext cx="0" cy="602"/>
+              <a:off x="1051" y="0"/>
+              <a:ext cx="8697" cy="2623"/>
+              <a:chOff x="0" y="637"/>
+              <a:chExt cx="8697" cy="2623"/>
             </a:xfrm>
-            <a:prstGeom prst="straightConnector1">
-              <a:avLst/>
-            </a:prstGeom>
-            <a:ln w="19050">
-              <a:headEnd type="triangle"/>
-              <a:tailEnd type="triangle"/>
-            </a:ln>
-          </p:spPr>
-          <p:style>
-            <a:lnRef idx="2">
-              <a:schemeClr val="accent1"/>
-            </a:lnRef>
-            <a:fillRef idx="0">
-              <a:srgbClr val="FFFFFF"/>
-            </a:fillRef>
-            <a:effectRef idx="0">
-              <a:srgbClr val="FFFFFF"/>
-            </a:effectRef>
-            <a:fontRef idx="minor">
-              <a:schemeClr val="tx1"/>
-            </a:fontRef>
-          </p:style>
-        </p:cxnSp>
-        <p:cxnSp>
-          <p:nvCxnSpPr>
-            <p:cNvPr id="25" name="直接连接符 24"/>
-            <p:cNvCxnSpPr>
-              <a:stCxn id="23" idx="3"/>
-              <a:endCxn id="2" idx="1"/>
-            </p:cNvCxnSpPr>
-            <p:nvPr userDrawn="1"/>
-          </p:nvCxnSpPr>
-          <p:spPr>
-            <a:xfrm flipV="1">
-              <a:off x="2356" y="6079"/>
-              <a:ext cx="1226" cy="1810"/>
-            </a:xfrm>
-            <a:prstGeom prst="line">
-              <a:avLst/>
-            </a:prstGeom>
-            <a:ln w="19050" cmpd="sng">
-              <a:prstDash val="dash"/>
-            </a:ln>
-          </p:spPr>
-          <p:style>
-            <a:lnRef idx="2">
-              <a:schemeClr val="accent1"/>
-            </a:lnRef>
-            <a:fillRef idx="0">
-              <a:srgbClr val="FFFFFF"/>
-            </a:fillRef>
-            <a:effectRef idx="0">
-              <a:srgbClr val="FFFFFF"/>
-            </a:effectRef>
-            <a:fontRef idx="minor">
-              <a:schemeClr val="tx1"/>
-            </a:fontRef>
-          </p:style>
-        </p:cxnSp>
-        <p:cxnSp>
-          <p:nvCxnSpPr>
-            <p:cNvPr id="26" name="直接连接符 25"/>
-            <p:cNvCxnSpPr>
-              <a:stCxn id="23" idx="3"/>
-              <a:endCxn id="10" idx="1"/>
-            </p:cNvCxnSpPr>
-            <p:nvPr userDrawn="1"/>
-          </p:nvCxnSpPr>
-          <p:spPr>
-            <a:xfrm>
-              <a:off x="2356" y="7889"/>
-              <a:ext cx="1226" cy="1848"/>
-            </a:xfrm>
-            <a:prstGeom prst="line">
-              <a:avLst/>
-            </a:prstGeom>
-            <a:ln w="19050" cmpd="sng">
-              <a:prstDash val="dash"/>
-            </a:ln>
-          </p:spPr>
-          <p:style>
-            <a:lnRef idx="2">
-              <a:schemeClr val="accent1"/>
-            </a:lnRef>
-            <a:fillRef idx="0">
-              <a:srgbClr val="FFFFFF"/>
-            </a:fillRef>
-            <a:effectRef idx="0">
-              <a:srgbClr val="FFFFFF"/>
-            </a:effectRef>
-            <a:fontRef idx="minor">
-              <a:schemeClr val="tx1"/>
-            </a:fontRef>
-          </p:style>
-        </p:cxnSp>
-        <p:cxnSp>
-          <p:nvCxnSpPr>
-            <p:cNvPr id="27" name="直接连接符 26"/>
-            <p:cNvCxnSpPr>
-              <a:stCxn id="23" idx="3"/>
-              <a:endCxn id="3" idx="1"/>
-            </p:cNvCxnSpPr>
-            <p:nvPr userDrawn="1"/>
-          </p:nvCxnSpPr>
-          <p:spPr>
-            <a:xfrm>
-              <a:off x="2356" y="7889"/>
-              <a:ext cx="1226" cy="0"/>
-            </a:xfrm>
-            <a:prstGeom prst="line">
-              <a:avLst/>
-            </a:prstGeom>
-            <a:ln w="19050" cmpd="sng">
-              <a:prstDash val="dash"/>
-            </a:ln>
-          </p:spPr>
-          <p:style>
-            <a:lnRef idx="2">
-              <a:schemeClr val="accent1"/>
-            </a:lnRef>
-            <a:fillRef idx="0">
-              <a:srgbClr val="FFFFFF"/>
-            </a:fillRef>
-            <a:effectRef idx="0">
-              <a:srgbClr val="FFFFFF"/>
-            </a:effectRef>
-            <a:fontRef idx="minor">
-              <a:schemeClr val="tx1"/>
-            </a:fontRef>
-          </p:style>
-        </p:cxnSp>
-        <p:sp>
-          <p:nvSpPr>
-            <p:cNvPr id="11" name="文本框 10"/>
-            <p:cNvSpPr txBox="1"/>
-            <p:nvPr userDrawn="1"/>
-          </p:nvSpPr>
-          <p:spPr>
-            <a:xfrm>
-              <a:off x="314" y="4893"/>
-              <a:ext cx="1728" cy="580"/>
-            </a:xfrm>
-            <a:prstGeom prst="rect">
-              <a:avLst/>
-            </a:prstGeom>
-          </p:spPr>
-          <p:txBody>
-            <a:bodyPr wrap="none" rtlCol="0">
-              <a:spAutoFit/>
-            </a:bodyPr>
-            <a:p>
-              <a:r>
-                <a:rPr lang="zh-CN" altLang="en-US">
-                  <a:solidFill>
-                    <a:schemeClr val="bg1"/>
-                  </a:solidFill>
-                  <a:highlight>
-                    <a:srgbClr val="000000"/>
-                  </a:highlight>
-                </a:rPr>
-                <a:t>在线</a:t>
-              </a:r>
-              <a:r>
-                <a:rPr lang="zh-CN" altLang="en-US">
-                  <a:solidFill>
-                    <a:schemeClr val="bg1"/>
-                  </a:solidFill>
-                  <a:highlight>
-                    <a:srgbClr val="000000"/>
-                  </a:highlight>
-                  <a:cs typeface="Arial" panose="020B0604020202020204" pitchFamily="34" charset="0"/>
-                </a:rPr>
-                <a:t>状态</a:t>
-              </a:r>
-              <a:endParaRPr lang="zh-CN" altLang="en-US">
-                <a:solidFill>
-                  <a:schemeClr val="bg1"/>
-                </a:solidFill>
-                <a:highlight>
-                  <a:srgbClr val="000000"/>
-                </a:highlight>
-              </a:endParaRPr>
-            </a:p>
-          </p:txBody>
-        </p:sp>
-        <p:sp>
-          <p:nvSpPr>
-            <p:cNvPr id="14" name="文本框 13"/>
-            <p:cNvSpPr txBox="1"/>
-            <p:nvPr userDrawn="1"/>
-          </p:nvSpPr>
-          <p:spPr>
-            <a:xfrm>
-              <a:off x="3896" y="4893"/>
-              <a:ext cx="1728" cy="580"/>
-            </a:xfrm>
-            <a:prstGeom prst="rect">
-              <a:avLst/>
-            </a:prstGeom>
-          </p:spPr>
-          <p:txBody>
-            <a:bodyPr wrap="none" rtlCol="0">
-              <a:spAutoFit/>
-            </a:bodyPr>
-            <a:p>
-              <a:pPr algn="l"/>
-              <a:r>
-                <a:rPr lang="zh-CN" altLang="en-US">
-                  <a:solidFill>
-                    <a:schemeClr val="bg1"/>
-                  </a:solidFill>
-                  <a:highlight>
-                    <a:srgbClr val="000000"/>
-                  </a:highlight>
-                </a:rPr>
-                <a:t>异常类型</a:t>
-              </a:r>
-              <a:endParaRPr lang="zh-CN" altLang="en-US">
-                <a:solidFill>
-                  <a:schemeClr val="bg1"/>
-                </a:solidFill>
-                <a:highlight>
-                  <a:srgbClr val="000000"/>
-                </a:highlight>
-              </a:endParaRPr>
-            </a:p>
-          </p:txBody>
-        </p:sp>
-      </p:grpSp>
-      <p:grpSp>
-        <p:nvGrpSpPr>
-          <p:cNvPr id="20" name="组合 19"/>
-          <p:cNvGrpSpPr/>
-          <p:nvPr userDrawn="1"/>
-        </p:nvGrpSpPr>
-        <p:grpSpPr>
-          <a:xfrm>
-            <a:off x="0" y="0"/>
-            <a:ext cx="6858000" cy="2303780"/>
-            <a:chOff x="0" y="0"/>
-            <a:chExt cx="10800" cy="3628"/>
-          </a:xfrm>
-        </p:grpSpPr>
-        <p:sp>
-          <p:nvSpPr>
-            <p:cNvPr id="5" name="矩形 4"/>
-            <p:cNvSpPr/>
-            <p:nvPr userDrawn="1"/>
-          </p:nvSpPr>
-          <p:spPr>
-            <a:xfrm>
-              <a:off x="0" y="582"/>
-              <a:ext cx="2356" cy="1208"/>
-            </a:xfrm>
-            <a:prstGeom prst="rect">
-              <a:avLst/>
-            </a:prstGeom>
-            <a:solidFill>
-              <a:schemeClr val="accent6">
-                <a:alpha val="100000"/>
-              </a:schemeClr>
-            </a:solidFill>
-            <a:ln w="12700" cmpd="sng">
-              <a:noFill/>
-              <a:prstDash val="solid"/>
-              <a:miter lim="800000"/>
-            </a:ln>
-          </p:spPr>
-          <p:style>
-            <a:lnRef idx="2">
-              <a:schemeClr val="accent1">
-                <a:lumMod val="75000"/>
-              </a:schemeClr>
-            </a:lnRef>
-            <a:fillRef idx="1">
-              <a:schemeClr val="accent1"/>
-            </a:fillRef>
-            <a:effectRef idx="0">
-              <a:srgbClr val="FFFFFF"/>
-            </a:effectRef>
-            <a:fontRef idx="minor">
-              <a:schemeClr val="lt1"/>
-            </a:fontRef>
-          </p:style>
-          <p:txBody>
-            <a:bodyPr rtlCol="0" anchor="ctr">
-              <a:noAutofit/>
-            </a:bodyPr>
-            <a:p>
-              <a:pPr algn="ctr"/>
-              <a:r>
-                <a:rPr lang="zh-CN" altLang="en-US">
+          </p:grpSpPr>
+          <p:sp>
+            <p:nvSpPr>
+              <p:cNvPr id="5" name="矩形 4"/>
+              <p:cNvSpPr/>
+              <p:nvPr userDrawn="1"/>
+            </p:nvSpPr>
+            <p:spPr>
+              <a:xfrm>
+                <a:off x="0" y="2407"/>
+                <a:ext cx="1701" cy="850"/>
+              </a:xfrm>
+              <a:prstGeom prst="rect">
+                <a:avLst/>
+              </a:prstGeom>
+              <a:solidFill>
+                <a:schemeClr val="accent6">
+                  <a:alpha val="100000"/>
+                </a:schemeClr>
+              </a:solidFill>
+              <a:ln w="12700" cmpd="sng">
+                <a:noFill/>
+                <a:prstDash val="solid"/>
+                <a:miter lim="800000"/>
+              </a:ln>
+            </p:spPr>
+            <p:style>
+              <a:lnRef idx="2">
+                <a:schemeClr val="accent1">
+                  <a:lumMod val="75000"/>
+                </a:schemeClr>
+              </a:lnRef>
+              <a:fillRef idx="1">
+                <a:schemeClr val="accent1"/>
+              </a:fillRef>
+              <a:effectRef idx="0">
+                <a:srgbClr val="FFFFFF"/>
+              </a:effectRef>
+              <a:fontRef idx="minor">
+                <a:schemeClr val="lt1"/>
+              </a:fontRef>
+            </p:style>
+            <p:txBody>
+              <a:bodyPr rtlCol="0" anchor="ctr">
+                <a:noAutofit/>
+              </a:bodyPr>
+              <a:p>
+                <a:pPr algn="ctr"/>
+                <a:r>
+                  <a:rPr lang="zh-CN" altLang="en-US" sz="1600">
+                    <a:solidFill>
+                      <a:schemeClr val="bg1"/>
+                    </a:solidFill>
+                    <a:latin typeface="微软雅黑" charset="0"/>
+                    <a:ea typeface="微软雅黑" charset="0"/>
+                    <a:cs typeface="微软雅黑" charset="0"/>
+                  </a:rPr>
+                  <a:t>入库</a:t>
+                </a:r>
+                <a:endParaRPr lang="zh-CN" altLang="en-US" sz="1600">
                   <a:solidFill>
                     <a:schemeClr val="bg1"/>
                   </a:solidFill>
                   <a:latin typeface="微软雅黑" charset="0"/>
                   <a:ea typeface="微软雅黑" charset="0"/>
                   <a:cs typeface="微软雅黑" charset="0"/>
-                </a:rPr>
-                <a:t>入库</a:t>
-              </a:r>
-              <a:endParaRPr lang="zh-CN" altLang="en-US">
-                <a:solidFill>
-                  <a:schemeClr val="bg1"/>
-                </a:solidFill>
-                <a:latin typeface="微软雅黑" charset="0"/>
-                <a:ea typeface="微软雅黑" charset="0"/>
-                <a:cs typeface="微软雅黑" charset="0"/>
-              </a:endParaRPr>
-            </a:p>
-          </p:txBody>
-        </p:sp>
-        <p:sp>
-          <p:nvSpPr>
-            <p:cNvPr id="6" name="矩形 5"/>
-            <p:cNvSpPr/>
-            <p:nvPr userDrawn="1"/>
-          </p:nvSpPr>
-          <p:spPr>
-            <a:xfrm>
-              <a:off x="5629" y="582"/>
-              <a:ext cx="2356" cy="1208"/>
-            </a:xfrm>
-            <a:prstGeom prst="rect">
-              <a:avLst/>
-            </a:prstGeom>
-            <a:solidFill>
-              <a:schemeClr val="accent3">
-                <a:alpha val="100000"/>
-              </a:schemeClr>
-            </a:solidFill>
-            <a:ln w="12700" cmpd="sng">
-              <a:noFill/>
-              <a:prstDash val="solid"/>
-              <a:miter lim="800000"/>
-            </a:ln>
-          </p:spPr>
-          <p:style>
-            <a:lnRef idx="2">
-              <a:schemeClr val="accent1">
-                <a:lumMod val="75000"/>
-              </a:schemeClr>
-            </a:lnRef>
-            <a:fillRef idx="1">
-              <a:schemeClr val="accent1"/>
-            </a:fillRef>
-            <a:effectRef idx="0">
-              <a:srgbClr val="FFFFFF"/>
-            </a:effectRef>
-            <a:fontRef idx="minor">
-              <a:schemeClr val="lt1"/>
-            </a:fontRef>
-          </p:style>
-          <p:txBody>
-            <a:bodyPr rtlCol="0" anchor="ctr">
-              <a:noAutofit/>
-            </a:bodyPr>
-            <a:p>
-              <a:pPr algn="ctr"/>
-              <a:r>
-                <a:rPr lang="zh-CN" altLang="en-US">
+                </a:endParaRPr>
+              </a:p>
+            </p:txBody>
+          </p:sp>
+          <p:sp>
+            <p:nvSpPr>
+              <p:cNvPr id="6" name="矩形 5"/>
+              <p:cNvSpPr/>
+              <p:nvPr userDrawn="1"/>
+            </p:nvSpPr>
+            <p:spPr>
+              <a:xfrm>
+                <a:off x="4666" y="2407"/>
+                <a:ext cx="1701" cy="850"/>
+              </a:xfrm>
+              <a:prstGeom prst="rect">
+                <a:avLst/>
+              </a:prstGeom>
+              <a:solidFill>
+                <a:schemeClr val="accent3">
+                  <a:alpha val="100000"/>
+                </a:schemeClr>
+              </a:solidFill>
+              <a:ln w="12700" cmpd="sng">
+                <a:noFill/>
+                <a:prstDash val="solid"/>
+                <a:miter lim="800000"/>
+              </a:ln>
+            </p:spPr>
+            <p:style>
+              <a:lnRef idx="2">
+                <a:schemeClr val="accent1">
+                  <a:lumMod val="75000"/>
+                </a:schemeClr>
+              </a:lnRef>
+              <a:fillRef idx="1">
+                <a:schemeClr val="accent1"/>
+              </a:fillRef>
+              <a:effectRef idx="0">
+                <a:srgbClr val="FFFFFF"/>
+              </a:effectRef>
+              <a:fontRef idx="minor">
+                <a:schemeClr val="lt1"/>
+              </a:fontRef>
+            </p:style>
+            <p:txBody>
+              <a:bodyPr rtlCol="0" anchor="ctr">
+                <a:noAutofit/>
+              </a:bodyPr>
+              <a:p>
+                <a:pPr algn="ctr"/>
+                <a:r>
+                  <a:rPr lang="zh-CN" altLang="en-US" sz="1600">
+                    <a:solidFill>
+                      <a:schemeClr val="bg1"/>
+                    </a:solidFill>
+                    <a:latin typeface="微软雅黑" charset="0"/>
+                    <a:ea typeface="微软雅黑" charset="0"/>
+                    <a:cs typeface="微软雅黑" charset="0"/>
+                  </a:rPr>
+                  <a:t>出库</a:t>
+                </a:r>
+                <a:endParaRPr lang="zh-CN" altLang="en-US" sz="1600">
                   <a:solidFill>
                     <a:schemeClr val="bg1"/>
                   </a:solidFill>
                   <a:latin typeface="微软雅黑" charset="0"/>
                   <a:ea typeface="微软雅黑" charset="0"/>
                   <a:cs typeface="微软雅黑" charset="0"/>
-                </a:rPr>
-                <a:t>出库</a:t>
-              </a:r>
-              <a:endParaRPr lang="zh-CN" altLang="en-US">
-                <a:solidFill>
-                  <a:schemeClr val="bg1"/>
-                </a:solidFill>
-                <a:latin typeface="微软雅黑" charset="0"/>
-                <a:ea typeface="微软雅黑" charset="0"/>
-                <a:cs typeface="微软雅黑" charset="0"/>
-              </a:endParaRPr>
-            </a:p>
-          </p:txBody>
-        </p:sp>
-        <p:sp>
-          <p:nvSpPr>
-            <p:cNvPr id="8" name="矩形 7"/>
-            <p:cNvSpPr/>
-            <p:nvPr userDrawn="1"/>
-          </p:nvSpPr>
-          <p:spPr>
-            <a:xfrm>
-              <a:off x="2815" y="2420"/>
-              <a:ext cx="2356" cy="1209"/>
-            </a:xfrm>
-            <a:prstGeom prst="rect">
-              <a:avLst/>
-            </a:prstGeom>
-            <a:solidFill>
-              <a:schemeClr val="accent4">
-                <a:alpha val="100000"/>
-              </a:schemeClr>
-            </a:solidFill>
-            <a:ln w="12700" cmpd="sng">
-              <a:noFill/>
-              <a:prstDash val="solid"/>
-              <a:miter lim="800000"/>
-            </a:ln>
-          </p:spPr>
-          <p:style>
-            <a:lnRef idx="2">
-              <a:schemeClr val="accent1">
-                <a:lumMod val="75000"/>
-              </a:schemeClr>
-            </a:lnRef>
-            <a:fillRef idx="1">
-              <a:schemeClr val="accent1"/>
-            </a:fillRef>
-            <a:effectRef idx="0">
-              <a:srgbClr val="FFFFFF"/>
-            </a:effectRef>
-            <a:fontRef idx="minor">
-              <a:schemeClr val="lt1"/>
-            </a:fontRef>
-          </p:style>
-          <p:txBody>
-            <a:bodyPr rtlCol="0" anchor="ctr">
-              <a:noAutofit/>
-            </a:bodyPr>
-            <a:p>
-              <a:pPr algn="ctr"/>
-              <a:r>
-                <a:rPr lang="zh-CN" altLang="en-US">
+                </a:endParaRPr>
+              </a:p>
+            </p:txBody>
+          </p:sp>
+          <p:sp>
+            <p:nvSpPr>
+              <p:cNvPr id="8" name="矩形 7"/>
+              <p:cNvSpPr/>
+              <p:nvPr userDrawn="1"/>
+            </p:nvSpPr>
+            <p:spPr>
+              <a:xfrm>
+                <a:off x="2335" y="1168"/>
+                <a:ext cx="1701" cy="850"/>
+              </a:xfrm>
+              <a:prstGeom prst="rect">
+                <a:avLst/>
+              </a:prstGeom>
+              <a:solidFill>
+                <a:schemeClr val="accent4">
+                  <a:alpha val="100000"/>
+                </a:schemeClr>
+              </a:solidFill>
+              <a:ln w="12700" cmpd="sng">
+                <a:noFill/>
+                <a:prstDash val="solid"/>
+                <a:miter lim="800000"/>
+              </a:ln>
+            </p:spPr>
+            <p:style>
+              <a:lnRef idx="2">
+                <a:schemeClr val="accent1">
+                  <a:lumMod val="75000"/>
+                </a:schemeClr>
+              </a:lnRef>
+              <a:fillRef idx="1">
+                <a:schemeClr val="accent1"/>
+              </a:fillRef>
+              <a:effectRef idx="0">
+                <a:srgbClr val="FFFFFF"/>
+              </a:effectRef>
+              <a:fontRef idx="minor">
+                <a:schemeClr val="lt1"/>
+              </a:fontRef>
+            </p:style>
+            <p:txBody>
+              <a:bodyPr rtlCol="0" anchor="ctr">
+                <a:noAutofit/>
+              </a:bodyPr>
+              <a:p>
+                <a:pPr algn="ctr"/>
+                <a:r>
+                  <a:rPr lang="zh-CN" altLang="en-US" sz="1600">
+                    <a:solidFill>
+                      <a:schemeClr val="bg1"/>
+                    </a:solidFill>
+                    <a:latin typeface="微软雅黑" charset="0"/>
+                    <a:ea typeface="微软雅黑" charset="0"/>
+                    <a:cs typeface="微软雅黑" charset="0"/>
+                  </a:rPr>
+                  <a:t>滞留</a:t>
+                </a:r>
+                <a:endParaRPr lang="zh-CN" altLang="en-US" sz="1600">
                   <a:solidFill>
                     <a:schemeClr val="bg1"/>
                   </a:solidFill>
                   <a:latin typeface="微软雅黑" charset="0"/>
                   <a:ea typeface="微软雅黑" charset="0"/>
                   <a:cs typeface="微软雅黑" charset="0"/>
-                </a:rPr>
-                <a:t>滞留</a:t>
-              </a:r>
-              <a:endParaRPr lang="zh-CN" altLang="en-US">
-                <a:solidFill>
-                  <a:schemeClr val="bg1"/>
-                </a:solidFill>
-                <a:latin typeface="微软雅黑" charset="0"/>
-                <a:ea typeface="微软雅黑" charset="0"/>
-                <a:cs typeface="微软雅黑" charset="0"/>
-              </a:endParaRPr>
-            </a:p>
-          </p:txBody>
-        </p:sp>
-        <p:sp>
-          <p:nvSpPr>
-            <p:cNvPr id="9" name="矩形 8"/>
-            <p:cNvSpPr/>
-            <p:nvPr userDrawn="1"/>
-          </p:nvSpPr>
-          <p:spPr>
-            <a:xfrm>
-              <a:off x="8444" y="582"/>
-              <a:ext cx="2356" cy="1208"/>
-            </a:xfrm>
-            <a:prstGeom prst="rect">
-              <a:avLst/>
-            </a:prstGeom>
-            <a:ln w="12700" cmpd="sng">
-              <a:noFill/>
-              <a:prstDash val="solid"/>
-              <a:miter lim="800000"/>
-            </a:ln>
-          </p:spPr>
-          <p:style>
-            <a:lnRef idx="2">
-              <a:schemeClr val="accent1">
-                <a:lumMod val="75000"/>
-              </a:schemeClr>
-            </a:lnRef>
-            <a:fillRef idx="1">
-              <a:schemeClr val="accent1"/>
-            </a:fillRef>
-            <a:effectRef idx="0">
-              <a:srgbClr val="FFFFFF"/>
-            </a:effectRef>
-            <a:fontRef idx="minor">
-              <a:schemeClr val="lt1"/>
-            </a:fontRef>
-          </p:style>
-          <p:txBody>
-            <a:bodyPr rtlCol="0" anchor="ctr">
-              <a:noAutofit/>
-            </a:bodyPr>
-            <a:p>
-              <a:pPr algn="ctr"/>
-              <a:r>
-                <a:rPr lang="zh-CN" altLang="en-US">
+                </a:endParaRPr>
+              </a:p>
+            </p:txBody>
+          </p:sp>
+          <p:sp>
+            <p:nvSpPr>
+              <p:cNvPr id="9" name="矩形 8"/>
+              <p:cNvSpPr/>
+              <p:nvPr userDrawn="1"/>
+            </p:nvSpPr>
+            <p:spPr>
+              <a:xfrm>
+                <a:off x="6997" y="2407"/>
+                <a:ext cx="1700" cy="850"/>
+              </a:xfrm>
+              <a:prstGeom prst="rect">
+                <a:avLst/>
+              </a:prstGeom>
+              <a:ln w="12700" cmpd="sng">
+                <a:noFill/>
+                <a:prstDash val="solid"/>
+                <a:miter lim="800000"/>
+              </a:ln>
+            </p:spPr>
+            <p:style>
+              <a:lnRef idx="2">
+                <a:schemeClr val="accent1">
+                  <a:lumMod val="75000"/>
+                </a:schemeClr>
+              </a:lnRef>
+              <a:fillRef idx="1">
+                <a:schemeClr val="accent1"/>
+              </a:fillRef>
+              <a:effectRef idx="0">
+                <a:srgbClr val="FFFFFF"/>
+              </a:effectRef>
+              <a:fontRef idx="minor">
+                <a:schemeClr val="lt1"/>
+              </a:fontRef>
+            </p:style>
+            <p:txBody>
+              <a:bodyPr rtlCol="0" anchor="ctr">
+                <a:noAutofit/>
+              </a:bodyPr>
+              <a:p>
+                <a:pPr algn="ctr"/>
+                <a:r>
+                  <a:rPr lang="zh-CN" altLang="en-US" sz="1600">
+                    <a:solidFill>
+                      <a:schemeClr val="bg1"/>
+                    </a:solidFill>
+                    <a:latin typeface="微软雅黑" charset="0"/>
+                    <a:ea typeface="微软雅黑" charset="0"/>
+                    <a:cs typeface="微软雅黑" charset="0"/>
+                  </a:rPr>
+                  <a:t>在途</a:t>
+                </a:r>
+                <a:endParaRPr lang="zh-CN" altLang="en-US" sz="1600">
                   <a:solidFill>
                     <a:schemeClr val="bg1"/>
                   </a:solidFill>
                   <a:latin typeface="微软雅黑" charset="0"/>
                   <a:ea typeface="微软雅黑" charset="0"/>
                   <a:cs typeface="微软雅黑" charset="0"/>
-                </a:rPr>
-                <a:t>在途</a:t>
-              </a:r>
-              <a:endParaRPr lang="zh-CN" altLang="en-US">
-                <a:solidFill>
-                  <a:schemeClr val="bg1"/>
-                </a:solidFill>
-                <a:latin typeface="微软雅黑" charset="0"/>
-                <a:ea typeface="微软雅黑" charset="0"/>
-                <a:cs typeface="微软雅黑" charset="0"/>
-              </a:endParaRPr>
-            </a:p>
-          </p:txBody>
-        </p:sp>
-        <p:sp>
-          <p:nvSpPr>
-            <p:cNvPr id="12" name="矩形 11"/>
-            <p:cNvSpPr/>
-            <p:nvPr userDrawn="1"/>
-          </p:nvSpPr>
-          <p:spPr>
-            <a:xfrm>
-              <a:off x="2815" y="582"/>
-              <a:ext cx="2356" cy="1208"/>
-            </a:xfrm>
-            <a:prstGeom prst="rect">
-              <a:avLst/>
-            </a:prstGeom>
-            <a:ln w="12700" cmpd="sng">
-              <a:noFill/>
-              <a:prstDash val="solid"/>
-              <a:miter lim="800000"/>
-            </a:ln>
-          </p:spPr>
-          <p:style>
-            <a:lnRef idx="2">
-              <a:schemeClr val="accent1">
-                <a:lumMod val="75000"/>
-              </a:schemeClr>
-            </a:lnRef>
-            <a:fillRef idx="1">
-              <a:schemeClr val="accent1"/>
-            </a:fillRef>
-            <a:effectRef idx="0">
-              <a:srgbClr val="FFFFFF"/>
-            </a:effectRef>
-            <a:fontRef idx="minor">
-              <a:schemeClr val="lt1"/>
-            </a:fontRef>
-          </p:style>
-          <p:txBody>
-            <a:bodyPr rtlCol="0" anchor="ctr">
-              <a:noAutofit/>
-            </a:bodyPr>
-            <a:p>
-              <a:pPr algn="ctr"/>
-              <a:r>
-                <a:rPr lang="zh-CN" altLang="en-US">
+                </a:endParaRPr>
+              </a:p>
+            </p:txBody>
+          </p:sp>
+          <p:sp>
+            <p:nvSpPr>
+              <p:cNvPr id="12" name="矩形 11"/>
+              <p:cNvSpPr/>
+              <p:nvPr userDrawn="1"/>
+            </p:nvSpPr>
+            <p:spPr>
+              <a:xfrm>
+                <a:off x="2335" y="2407"/>
+                <a:ext cx="1701" cy="850"/>
+              </a:xfrm>
+              <a:prstGeom prst="rect">
+                <a:avLst/>
+              </a:prstGeom>
+              <a:ln w="12700" cmpd="sng">
+                <a:noFill/>
+                <a:prstDash val="solid"/>
+                <a:miter lim="800000"/>
+              </a:ln>
+            </p:spPr>
+            <p:style>
+              <a:lnRef idx="2">
+                <a:schemeClr val="accent1">
+                  <a:lumMod val="75000"/>
+                </a:schemeClr>
+              </a:lnRef>
+              <a:fillRef idx="1">
+                <a:schemeClr val="accent1"/>
+              </a:fillRef>
+              <a:effectRef idx="0">
+                <a:srgbClr val="FFFFFF"/>
+              </a:effectRef>
+              <a:fontRef idx="minor">
+                <a:schemeClr val="lt1"/>
+              </a:fontRef>
+            </p:style>
+            <p:txBody>
+              <a:bodyPr rtlCol="0" anchor="ctr">
+                <a:noAutofit/>
+              </a:bodyPr>
+              <a:p>
+                <a:pPr algn="ctr"/>
+                <a:r>
+                  <a:rPr lang="zh-CN" altLang="en-US" sz="1600">
+                    <a:solidFill>
+                      <a:schemeClr val="bg1"/>
+                    </a:solidFill>
+                    <a:latin typeface="微软雅黑" charset="0"/>
+                    <a:ea typeface="微软雅黑" charset="0"/>
+                    <a:cs typeface="微软雅黑" charset="0"/>
+                  </a:rPr>
+                  <a:t>在库</a:t>
+                </a:r>
+                <a:endParaRPr lang="zh-CN" altLang="en-US" sz="1600">
                   <a:solidFill>
                     <a:schemeClr val="bg1"/>
                   </a:solidFill>
                   <a:latin typeface="微软雅黑" charset="0"/>
                   <a:ea typeface="微软雅黑" charset="0"/>
                   <a:cs typeface="微软雅黑" charset="0"/>
-                </a:rPr>
-                <a:t>在库</a:t>
-              </a:r>
-              <a:endParaRPr lang="zh-CN" altLang="en-US">
-                <a:solidFill>
-                  <a:schemeClr val="bg1"/>
-                </a:solidFill>
-                <a:latin typeface="微软雅黑" charset="0"/>
-                <a:ea typeface="微软雅黑" charset="0"/>
-                <a:cs typeface="微软雅黑" charset="0"/>
-              </a:endParaRPr>
-            </a:p>
-          </p:txBody>
-        </p:sp>
-        <p:cxnSp>
-          <p:nvCxnSpPr>
-            <p:cNvPr id="4" name="直接箭头连接符 3"/>
-            <p:cNvCxnSpPr>
-              <a:stCxn id="5" idx="3"/>
-              <a:endCxn id="12" idx="1"/>
-            </p:cNvCxnSpPr>
-            <p:nvPr userDrawn="1"/>
-          </p:nvCxnSpPr>
-          <p:spPr>
-            <a:xfrm>
-              <a:off x="2356" y="1186"/>
-              <a:ext cx="459" cy="0"/>
-            </a:xfrm>
-            <a:prstGeom prst="straightConnector1">
-              <a:avLst/>
-            </a:prstGeom>
-            <a:ln w="19050">
-              <a:tailEnd type="triangle"/>
-            </a:ln>
-          </p:spPr>
-          <p:style>
-            <a:lnRef idx="2">
-              <a:schemeClr val="accent1"/>
-            </a:lnRef>
-            <a:fillRef idx="0">
-              <a:srgbClr val="FFFFFF"/>
-            </a:fillRef>
-            <a:effectRef idx="0">
-              <a:srgbClr val="FFFFFF"/>
-            </a:effectRef>
-            <a:fontRef idx="minor">
-              <a:schemeClr val="tx1"/>
-            </a:fontRef>
-          </p:style>
-        </p:cxnSp>
-        <p:cxnSp>
-          <p:nvCxnSpPr>
-            <p:cNvPr id="13" name="直接箭头连接符 12"/>
-            <p:cNvCxnSpPr>
-              <a:stCxn id="6" idx="3"/>
-              <a:endCxn id="9" idx="1"/>
-            </p:cNvCxnSpPr>
-            <p:nvPr userDrawn="1"/>
-          </p:nvCxnSpPr>
-          <p:spPr>
-            <a:xfrm>
-              <a:off x="7985" y="1186"/>
-              <a:ext cx="459" cy="0"/>
-            </a:xfrm>
-            <a:prstGeom prst="straightConnector1">
-              <a:avLst/>
-            </a:prstGeom>
-            <a:ln w="19050">
-              <a:tailEnd type="triangle"/>
-            </a:ln>
-          </p:spPr>
-          <p:style>
-            <a:lnRef idx="2">
-              <a:schemeClr val="accent1"/>
-            </a:lnRef>
-            <a:fillRef idx="0">
-              <a:srgbClr val="FFFFFF"/>
-            </a:fillRef>
-            <a:effectRef idx="0">
-              <a:srgbClr val="FFFFFF"/>
-            </a:effectRef>
-            <a:fontRef idx="minor">
-              <a:schemeClr val="tx1"/>
-            </a:fontRef>
-          </p:style>
-        </p:cxnSp>
-        <p:cxnSp>
-          <p:nvCxnSpPr>
-            <p:cNvPr id="16" name="直接箭头连接符 15"/>
-            <p:cNvCxnSpPr>
-              <a:stCxn id="12" idx="2"/>
-              <a:endCxn id="8" idx="0"/>
-            </p:cNvCxnSpPr>
-            <p:nvPr userDrawn="1"/>
-          </p:nvCxnSpPr>
-          <p:spPr>
-            <a:xfrm>
-              <a:off x="3993" y="1790"/>
-              <a:ext cx="0" cy="630"/>
-            </a:xfrm>
-            <a:prstGeom prst="straightConnector1">
-              <a:avLst/>
-            </a:prstGeom>
-            <a:ln w="19050">
-              <a:tailEnd type="triangle"/>
-            </a:ln>
-          </p:spPr>
-          <p:style>
-            <a:lnRef idx="2">
-              <a:schemeClr val="accent1"/>
-            </a:lnRef>
-            <a:fillRef idx="0">
-              <a:srgbClr val="FFFFFF"/>
-            </a:fillRef>
-            <a:effectRef idx="0">
-              <a:srgbClr val="FFFFFF"/>
-            </a:effectRef>
-            <a:fontRef idx="minor">
-              <a:schemeClr val="tx1"/>
-            </a:fontRef>
-          </p:style>
-        </p:cxnSp>
-        <p:cxnSp>
-          <p:nvCxnSpPr>
-            <p:cNvPr id="17" name="直接箭头连接符 16"/>
-            <p:cNvCxnSpPr>
-              <a:stCxn id="12" idx="3"/>
-              <a:endCxn id="6" idx="1"/>
-            </p:cNvCxnSpPr>
-            <p:nvPr userDrawn="1"/>
-          </p:nvCxnSpPr>
-          <p:spPr>
-            <a:xfrm>
-              <a:off x="5171" y="1186"/>
-              <a:ext cx="458" cy="0"/>
-            </a:xfrm>
-            <a:prstGeom prst="straightConnector1">
-              <a:avLst/>
-            </a:prstGeom>
-            <a:ln w="19050">
-              <a:tailEnd type="triangle"/>
-            </a:ln>
-          </p:spPr>
-          <p:style>
-            <a:lnRef idx="2">
-              <a:schemeClr val="accent1"/>
-            </a:lnRef>
-            <a:fillRef idx="0">
-              <a:srgbClr val="FFFFFF"/>
-            </a:fillRef>
-            <a:effectRef idx="0">
-              <a:srgbClr val="FFFFFF"/>
-            </a:effectRef>
-            <a:fontRef idx="minor">
-              <a:schemeClr val="tx1"/>
-            </a:fontRef>
-          </p:style>
-        </p:cxnSp>
-        <p:cxnSp>
-          <p:nvCxnSpPr>
-            <p:cNvPr id="18" name="肘形连接符 17"/>
-            <p:cNvCxnSpPr>
-              <a:stCxn id="9" idx="2"/>
-              <a:endCxn id="5" idx="2"/>
-            </p:cNvCxnSpPr>
-            <p:nvPr userDrawn="1"/>
-          </p:nvCxnSpPr>
-          <p:spPr>
-            <a:xfrm rot="5400000">
-              <a:off x="5400" y="-2432"/>
-              <a:ext cx="5" cy="8444"/>
-            </a:xfrm>
-            <a:prstGeom prst="bentConnector3">
-              <a:avLst>
-                <a:gd name="adj1" fmla="val 48106944"/>
-              </a:avLst>
-            </a:prstGeom>
-            <a:ln w="19050">
-              <a:tailEnd type="triangle"/>
-            </a:ln>
-          </p:spPr>
-          <p:style>
-            <a:lnRef idx="2">
-              <a:schemeClr val="accent1"/>
-            </a:lnRef>
-            <a:fillRef idx="0">
-              <a:srgbClr val="FFFFFF"/>
-            </a:fillRef>
-            <a:effectRef idx="0">
-              <a:srgbClr val="FFFFFF"/>
-            </a:effectRef>
-            <a:fontRef idx="minor">
-              <a:schemeClr val="tx1"/>
-            </a:fontRef>
-          </p:style>
-        </p:cxnSp>
-        <p:cxnSp>
-          <p:nvCxnSpPr>
-            <p:cNvPr id="22" name="肘形连接符 21"/>
-            <p:cNvCxnSpPr>
-              <a:stCxn id="8" idx="3"/>
-              <a:endCxn id="6" idx="2"/>
-            </p:cNvCxnSpPr>
-            <p:nvPr userDrawn="1"/>
-          </p:nvCxnSpPr>
-          <p:spPr>
-            <a:xfrm flipV="1">
-              <a:off x="5171" y="1790"/>
-              <a:ext cx="1636" cy="1235"/>
-            </a:xfrm>
-            <a:prstGeom prst="bentConnector2">
-              <a:avLst/>
-            </a:prstGeom>
-            <a:ln w="19050">
-              <a:tailEnd type="triangle"/>
-            </a:ln>
-          </p:spPr>
-          <p:style>
-            <a:lnRef idx="2">
-              <a:schemeClr val="accent1"/>
-            </a:lnRef>
-            <a:fillRef idx="0">
-              <a:srgbClr val="FFFFFF"/>
-            </a:fillRef>
-            <a:effectRef idx="0">
-              <a:srgbClr val="FFFFFF"/>
-            </a:effectRef>
-            <a:fontRef idx="minor">
-              <a:schemeClr val="tx1"/>
-            </a:fontRef>
-          </p:style>
-        </p:cxnSp>
-        <p:sp>
-          <p:nvSpPr>
-            <p:cNvPr id="15" name="文本框 14"/>
-            <p:cNvSpPr txBox="1"/>
-            <p:nvPr userDrawn="1"/>
-          </p:nvSpPr>
-          <p:spPr>
-            <a:xfrm>
-              <a:off x="314" y="0"/>
-              <a:ext cx="1728" cy="580"/>
-            </a:xfrm>
-            <a:prstGeom prst="rect">
-              <a:avLst/>
-            </a:prstGeom>
-          </p:spPr>
-          <p:txBody>
-            <a:bodyPr wrap="none" rtlCol="0">
-              <a:spAutoFit/>
-            </a:bodyPr>
-            <a:p>
-              <a:pPr algn="l"/>
-              <a:r>
-                <a:rPr lang="zh-CN" altLang="en-US">
+                </a:endParaRPr>
+              </a:p>
+            </p:txBody>
+          </p:sp>
+          <p:cxnSp>
+            <p:nvCxnSpPr>
+              <p:cNvPr id="4" name="直接箭头连接符 3"/>
+              <p:cNvCxnSpPr>
+                <a:stCxn id="5" idx="3"/>
+                <a:endCxn id="12" idx="1"/>
+              </p:cNvCxnSpPr>
+              <p:nvPr userDrawn="1"/>
+            </p:nvCxnSpPr>
+            <p:spPr>
+              <a:xfrm>
+                <a:off x="1701" y="2832"/>
+                <a:ext cx="634" cy="0"/>
+              </a:xfrm>
+              <a:prstGeom prst="straightConnector1">
+                <a:avLst/>
+              </a:prstGeom>
+              <a:ln w="19050">
+                <a:tailEnd type="triangle"/>
+              </a:ln>
+            </p:spPr>
+            <p:style>
+              <a:lnRef idx="2">
+                <a:schemeClr val="accent1"/>
+              </a:lnRef>
+              <a:fillRef idx="0">
+                <a:srgbClr val="FFFFFF"/>
+              </a:fillRef>
+              <a:effectRef idx="0">
+                <a:srgbClr val="FFFFFF"/>
+              </a:effectRef>
+              <a:fontRef idx="minor">
+                <a:schemeClr val="tx1"/>
+              </a:fontRef>
+            </p:style>
+          </p:cxnSp>
+          <p:cxnSp>
+            <p:nvCxnSpPr>
+              <p:cNvPr id="13" name="直接箭头连接符 12"/>
+              <p:cNvCxnSpPr>
+                <a:stCxn id="6" idx="3"/>
+                <a:endCxn id="9" idx="1"/>
+              </p:cNvCxnSpPr>
+              <p:nvPr userDrawn="1"/>
+            </p:nvCxnSpPr>
+            <p:spPr>
+              <a:xfrm>
+                <a:off x="6367" y="2832"/>
+                <a:ext cx="630" cy="0"/>
+              </a:xfrm>
+              <a:prstGeom prst="straightConnector1">
+                <a:avLst/>
+              </a:prstGeom>
+              <a:ln w="19050">
+                <a:tailEnd type="triangle"/>
+              </a:ln>
+            </p:spPr>
+            <p:style>
+              <a:lnRef idx="2">
+                <a:schemeClr val="accent1"/>
+              </a:lnRef>
+              <a:fillRef idx="0">
+                <a:srgbClr val="FFFFFF"/>
+              </a:fillRef>
+              <a:effectRef idx="0">
+                <a:srgbClr val="FFFFFF"/>
+              </a:effectRef>
+              <a:fontRef idx="minor">
+                <a:schemeClr val="tx1"/>
+              </a:fontRef>
+            </p:style>
+          </p:cxnSp>
+          <p:cxnSp>
+            <p:nvCxnSpPr>
+              <p:cNvPr id="16" name="直接箭头连接符 15"/>
+              <p:cNvCxnSpPr>
+                <a:stCxn id="12" idx="0"/>
+                <a:endCxn id="8" idx="2"/>
+              </p:cNvCxnSpPr>
+              <p:nvPr userDrawn="1"/>
+            </p:nvCxnSpPr>
+            <p:spPr>
+              <a:xfrm flipV="1">
+                <a:off x="3186" y="2018"/>
+                <a:ext cx="0" cy="389"/>
+              </a:xfrm>
+              <a:prstGeom prst="straightConnector1">
+                <a:avLst/>
+              </a:prstGeom>
+              <a:ln w="19050">
+                <a:tailEnd type="triangle"/>
+              </a:ln>
+            </p:spPr>
+            <p:style>
+              <a:lnRef idx="2">
+                <a:schemeClr val="accent1"/>
+              </a:lnRef>
+              <a:fillRef idx="0">
+                <a:srgbClr val="FFFFFF"/>
+              </a:fillRef>
+              <a:effectRef idx="0">
+                <a:srgbClr val="FFFFFF"/>
+              </a:effectRef>
+              <a:fontRef idx="minor">
+                <a:schemeClr val="tx1"/>
+              </a:fontRef>
+            </p:style>
+          </p:cxnSp>
+          <p:cxnSp>
+            <p:nvCxnSpPr>
+              <p:cNvPr id="17" name="直接箭头连接符 16"/>
+              <p:cNvCxnSpPr>
+                <a:stCxn id="12" idx="3"/>
+                <a:endCxn id="6" idx="1"/>
+              </p:cNvCxnSpPr>
+              <p:nvPr userDrawn="1"/>
+            </p:nvCxnSpPr>
+            <p:spPr>
+              <a:xfrm>
+                <a:off x="4036" y="2832"/>
+                <a:ext cx="630" cy="0"/>
+              </a:xfrm>
+              <a:prstGeom prst="straightConnector1">
+                <a:avLst/>
+              </a:prstGeom>
+              <a:ln w="19050">
+                <a:tailEnd type="triangle"/>
+              </a:ln>
+            </p:spPr>
+            <p:style>
+              <a:lnRef idx="2">
+                <a:schemeClr val="accent1"/>
+              </a:lnRef>
+              <a:fillRef idx="0">
+                <a:srgbClr val="FFFFFF"/>
+              </a:fillRef>
+              <a:effectRef idx="0">
+                <a:srgbClr val="FFFFFF"/>
+              </a:effectRef>
+              <a:fontRef idx="minor">
+                <a:schemeClr val="tx1"/>
+              </a:fontRef>
+            </p:style>
+          </p:cxnSp>
+          <p:cxnSp>
+            <p:nvCxnSpPr>
+              <p:cNvPr id="22" name="肘形连接符 21"/>
+              <p:cNvCxnSpPr>
+                <a:stCxn id="8" idx="3"/>
+                <a:endCxn id="6" idx="0"/>
+              </p:cNvCxnSpPr>
+              <p:nvPr userDrawn="1"/>
+            </p:nvCxnSpPr>
+            <p:spPr>
+              <a:xfrm>
+                <a:off x="4036" y="1593"/>
+                <a:ext cx="1481" cy="814"/>
+              </a:xfrm>
+              <a:prstGeom prst="bentConnector2">
+                <a:avLst/>
+              </a:prstGeom>
+              <a:ln w="19050">
+                <a:tailEnd type="triangle"/>
+              </a:ln>
+            </p:spPr>
+            <p:style>
+              <a:lnRef idx="2">
+                <a:schemeClr val="accent1"/>
+              </a:lnRef>
+              <a:fillRef idx="0">
+                <a:srgbClr val="FFFFFF"/>
+              </a:fillRef>
+              <a:effectRef idx="0">
+                <a:srgbClr val="FFFFFF"/>
+              </a:effectRef>
+              <a:fontRef idx="minor">
+                <a:schemeClr val="tx1"/>
+              </a:fontRef>
+            </p:style>
+          </p:cxnSp>
+          <p:sp>
+            <p:nvSpPr>
+              <p:cNvPr id="15" name="文本框 14"/>
+              <p:cNvSpPr txBox="1"/>
+              <p:nvPr userDrawn="1"/>
+            </p:nvSpPr>
+            <p:spPr>
+              <a:xfrm>
+                <a:off x="2401" y="637"/>
+                <a:ext cx="1568" cy="531"/>
+              </a:xfrm>
+              <a:prstGeom prst="rect">
+                <a:avLst/>
+              </a:prstGeom>
+            </p:spPr>
+            <p:txBody>
+              <a:bodyPr wrap="none" rtlCol="0">
+                <a:noAutofit/>
+              </a:bodyPr>
+              <a:p>
+                <a:pPr algn="l"/>
+                <a:r>
+                  <a:rPr lang="zh-CN" altLang="en-US" sz="1600">
+                    <a:solidFill>
+                      <a:srgbClr val="000000"/>
+                    </a:solidFill>
+                  </a:rPr>
+                  <a:t>资产状态</a:t>
+                </a:r>
+                <a:endParaRPr lang="zh-CN" altLang="en-US" sz="1600">
                   <a:solidFill>
-                    <a:schemeClr val="bg1"/>
+                    <a:srgbClr val="000000"/>
                   </a:solidFill>
-                  <a:highlight>
-                    <a:srgbClr val="000000"/>
-                  </a:highlight>
-                </a:rPr>
-                <a:t>资产状态</a:t>
-              </a:r>
-              <a:endParaRPr lang="zh-CN" altLang="en-US">
-                <a:solidFill>
-                  <a:schemeClr val="bg1"/>
-                </a:solidFill>
-                <a:highlight>
-                  <a:srgbClr val="000000"/>
-                </a:highlight>
-              </a:endParaRPr>
-            </a:p>
-          </p:txBody>
-        </p:sp>
+                </a:endParaRPr>
+              </a:p>
+            </p:txBody>
+          </p:sp>
+          <p:cxnSp>
+            <p:nvCxnSpPr>
+              <p:cNvPr id="41" name="肘形连接符 40"/>
+              <p:cNvCxnSpPr>
+                <a:stCxn id="9" idx="2"/>
+                <a:endCxn id="5" idx="2"/>
+              </p:cNvCxnSpPr>
+              <p:nvPr userDrawn="1"/>
+            </p:nvCxnSpPr>
+            <p:spPr>
+              <a:xfrm rot="5400000">
+                <a:off x="4349" y="-241"/>
+                <a:ext cx="5" cy="6996"/>
+              </a:xfrm>
+              <a:prstGeom prst="bentConnector3">
+                <a:avLst>
+                  <a:gd name="adj1" fmla="val 7548182"/>
+                </a:avLst>
+              </a:prstGeom>
+              <a:ln w="19050">
+                <a:headEnd type="none"/>
+                <a:tailEnd type="triangle"/>
+              </a:ln>
+            </p:spPr>
+            <p:style>
+              <a:lnRef idx="2">
+                <a:schemeClr val="accent1"/>
+              </a:lnRef>
+              <a:fillRef idx="0">
+                <a:srgbClr val="FFFFFF"/>
+              </a:fillRef>
+              <a:effectRef idx="0">
+                <a:srgbClr val="FFFFFF"/>
+              </a:effectRef>
+              <a:fontRef idx="minor">
+                <a:schemeClr val="tx1"/>
+              </a:fontRef>
+            </p:style>
+          </p:cxnSp>
+        </p:grpSp>
       </p:grpSp>
     </p:spTree>
   </p:cSld>

--- a/0 DB/资产状态.pptx
+++ b/0 DB/资产状态.pptx
@@ -4346,7 +4346,7 @@
                 <a:avLst/>
               </a:prstGeom>
               <a:solidFill>
-                <a:schemeClr val="accent6">
+                <a:schemeClr val="accent4">
                   <a:alpha val="100000"/>
                 </a:schemeClr>
               </a:solidFill>
@@ -4484,9 +4484,9 @@
                 <a:avLst/>
               </a:prstGeom>
               <a:solidFill>
-                <a:schemeClr val="accent4">
+                <a:srgbClr val="C00000">
                   <a:alpha val="100000"/>
-                </a:schemeClr>
+                </a:srgbClr>
               </a:solidFill>
               <a:ln w="12700" cmpd="sng">
                 <a:noFill/>
@@ -4552,6 +4552,11 @@
               <a:prstGeom prst="rect">
                 <a:avLst/>
               </a:prstGeom>
+              <a:solidFill>
+                <a:schemeClr val="accent1">
+                  <a:alpha val="100000"/>
+                </a:schemeClr>
+              </a:solidFill>
               <a:ln w="12700" cmpd="sng">
                 <a:noFill/>
                 <a:prstDash val="solid"/>
@@ -4616,6 +4621,11 @@
               <a:prstGeom prst="rect">
                 <a:avLst/>
               </a:prstGeom>
+              <a:solidFill>
+                <a:schemeClr val="accent6">
+                  <a:alpha val="100000"/>
+                </a:schemeClr>
+              </a:solidFill>
               <a:ln w="12700" cmpd="sng">
                 <a:noFill/>
                 <a:prstDash val="solid"/>
